--- a/Final Pitch.pptx
+++ b/Final Pitch.pptx
@@ -19072,7 +19072,15 @@
             </a:br>
             <a:r>
               <a:rPr lang="en-GB" sz="1600" dirty="0"/>
-              <a:t>We built an AI-driven pothole detector that uses vehicle sensors to automatically detect, classify, and share pothole events in real time.</a:t>
+              <a:t>We </a:t>
+            </a:r>
+            <a:r>
+              <a:rPr lang="en-GB" sz="1600"/>
+              <a:t>built an pothole </a:t>
+            </a:r>
+            <a:r>
+              <a:rPr lang="en-GB" sz="1600" dirty="0"/>
+              <a:t>detector that uses vehicle sensors to automatically detect, classify, and share pothole events in real time.</a:t>
             </a:r>
           </a:p>
           <a:p>

--- a/Final Pitch.pptx
+++ b/Final Pitch.pptx
@@ -6,7 +6,7 @@
     <p:sldMasterId id="2147483677" r:id="rId2"/>
   </p:sldMasterIdLst>
   <p:notesMasterIdLst>
-    <p:notesMasterId r:id="rId13"/>
+    <p:notesMasterId r:id="rId14"/>
   </p:notesMasterIdLst>
   <p:sldIdLst>
     <p:sldId id="256" r:id="rId3"/>
@@ -17,29 +17,30 @@
     <p:sldId id="261" r:id="rId8"/>
     <p:sldId id="262" r:id="rId9"/>
     <p:sldId id="263" r:id="rId10"/>
-    <p:sldId id="264" r:id="rId11"/>
-    <p:sldId id="265" r:id="rId12"/>
+    <p:sldId id="266" r:id="rId11"/>
+    <p:sldId id="264" r:id="rId12"/>
+    <p:sldId id="265" r:id="rId13"/>
   </p:sldIdLst>
   <p:sldSz cx="9144000" cy="5143500" type="screen16x9"/>
   <p:notesSz cx="6858000" cy="9144000"/>
   <p:embeddedFontLst>
     <p:embeddedFont>
       <p:font typeface="Audiowide" panose="02000503000000020004" pitchFamily="2" charset="0"/>
-      <p:regular r:id="rId14"/>
+      <p:regular r:id="rId15"/>
     </p:embeddedFont>
     <p:embeddedFont>
       <p:font typeface="Helvetica Neue Light" panose="02000403000000020004" pitchFamily="2" charset="0"/>
-      <p:regular r:id="rId15"/>
-      <p:bold r:id="rId16"/>
-      <p:italic r:id="rId17"/>
-      <p:boldItalic r:id="rId18"/>
+      <p:regular r:id="rId16"/>
+      <p:bold r:id="rId17"/>
+      <p:italic r:id="rId18"/>
+      <p:boldItalic r:id="rId19"/>
     </p:embeddedFont>
     <p:embeddedFont>
       <p:font typeface="Roboto" panose="02000000000000000000" pitchFamily="2" charset="0"/>
-      <p:regular r:id="rId19"/>
-      <p:bold r:id="rId20"/>
-      <p:italic r:id="rId21"/>
-      <p:boldItalic r:id="rId22"/>
+      <p:regular r:id="rId20"/>
+      <p:bold r:id="rId21"/>
+      <p:italic r:id="rId22"/>
+      <p:boldItalic r:id="rId23"/>
     </p:embeddedFont>
   </p:embeddedFontLst>
   <p:defaultTextStyle>
@@ -858,6 +859,128 @@
   <p:cSld>
     <p:spTree>
       <p:nvGrpSpPr>
+        <p:cNvPr id="1" name="Shape 193"/>
+        <p:cNvGrpSpPr/>
+        <p:nvPr/>
+      </p:nvGrpSpPr>
+      <p:grpSpPr>
+        <a:xfrm>
+          <a:off x="0" y="0"/>
+          <a:ext cx="0" cy="0"/>
+          <a:chOff x="0" y="0"/>
+          <a:chExt cx="0" cy="0"/>
+        </a:xfrm>
+      </p:grpSpPr>
+      <p:sp>
+        <p:nvSpPr>
+          <p:cNvPr id="194" name="Google Shape;194;g387cfdbd564_0_278:notes"/>
+          <p:cNvSpPr>
+            <a:spLocks noGrp="1" noRot="1" noChangeAspect="1"/>
+          </p:cNvSpPr>
+          <p:nvPr>
+            <p:ph type="sldImg" idx="2"/>
+          </p:nvPr>
+        </p:nvSpPr>
+        <p:spPr>
+          <a:xfrm>
+            <a:off x="381000" y="685800"/>
+            <a:ext cx="6096000" cy="3429000"/>
+          </a:xfrm>
+          <a:custGeom>
+            <a:avLst/>
+            <a:gdLst/>
+            <a:ahLst/>
+            <a:cxnLst/>
+            <a:rect l="l" t="t" r="r" b="b"/>
+            <a:pathLst>
+              <a:path w="120000" h="120000" extrusionOk="0">
+                <a:moveTo>
+                  <a:pt x="0" y="0"/>
+                </a:moveTo>
+                <a:lnTo>
+                  <a:pt x="120000" y="0"/>
+                </a:lnTo>
+                <a:lnTo>
+                  <a:pt x="120000" y="120000"/>
+                </a:lnTo>
+                <a:lnTo>
+                  <a:pt x="0" y="120000"/>
+                </a:lnTo>
+                <a:close/>
+              </a:path>
+            </a:pathLst>
+          </a:custGeom>
+          <a:noFill/>
+          <a:ln w="9525" cap="flat" cmpd="sng">
+            <a:solidFill>
+              <a:srgbClr val="000000"/>
+            </a:solidFill>
+            <a:prstDash val="solid"/>
+            <a:round/>
+            <a:headEnd type="none" w="sm" len="sm"/>
+            <a:tailEnd type="none" w="sm" len="sm"/>
+          </a:ln>
+        </p:spPr>
+      </p:sp>
+      <p:sp>
+        <p:nvSpPr>
+          <p:cNvPr id="195" name="Google Shape;195;g387cfdbd564_0_278:notes"/>
+          <p:cNvSpPr txBox="1">
+            <a:spLocks noGrp="1"/>
+          </p:cNvSpPr>
+          <p:nvPr>
+            <p:ph type="body" idx="1"/>
+          </p:nvPr>
+        </p:nvSpPr>
+        <p:spPr>
+          <a:xfrm>
+            <a:off x="685800" y="4343400"/>
+            <a:ext cx="5486400" cy="4114800"/>
+          </a:xfrm>
+          <a:prstGeom prst="rect">
+            <a:avLst/>
+          </a:prstGeom>
+          <a:noFill/>
+          <a:ln>
+            <a:noFill/>
+          </a:ln>
+        </p:spPr>
+        <p:txBody>
+          <a:bodyPr spcFirstLastPara="1" wrap="square" lIns="91425" tIns="91425" rIns="91425" bIns="91425" anchor="t" anchorCtr="0">
+            <a:noAutofit/>
+          </a:bodyPr>
+          <a:lstStyle/>
+          <a:p>
+            <a:pPr marL="0" lvl="0" indent="0" algn="l" rtl="0">
+              <a:lnSpc>
+                <a:spcPct val="100000"/>
+              </a:lnSpc>
+              <a:spcBef>
+                <a:spcPts val="0"/>
+              </a:spcBef>
+              <a:spcAft>
+                <a:spcPts val="0"/>
+              </a:spcAft>
+              <a:buSzPts val="1100"/>
+              <a:buNone/>
+            </a:pPr>
+            <a:endParaRPr/>
+          </a:p>
+        </p:txBody>
+      </p:sp>
+    </p:spTree>
+  </p:cSld>
+  <p:clrMapOvr>
+    <a:masterClrMapping/>
+  </p:clrMapOvr>
+</p:notes>
+</file>
+
+<file path=ppt/notesSlides/notesSlide11.xml><?xml version="1.0" encoding="utf-8"?>
+<p:notes xmlns:a="http://schemas.openxmlformats.org/drawingml/2006/main" xmlns:r="http://schemas.openxmlformats.org/officeDocument/2006/relationships" xmlns:p="http://schemas.openxmlformats.org/presentationml/2006/main" showMasterSp="0" showMasterPhAnim="0">
+  <p:cSld>
+    <p:spTree>
+      <p:nvGrpSpPr>
         <p:cNvPr id="1" name="Shape 200"/>
         <p:cNvGrpSpPr/>
         <p:nvPr/>
@@ -1834,7 +1957,13 @@
   <p:cSld>
     <p:spTree>
       <p:nvGrpSpPr>
-        <p:cNvPr id="1" name="Shape 193"/>
+        <p:cNvPr id="1" name="Shape 186">
+          <a:extLst>
+            <a:ext uri="{FF2B5EF4-FFF2-40B4-BE49-F238E27FC236}">
+              <a16:creationId xmlns:a16="http://schemas.microsoft.com/office/drawing/2014/main" id="{386998F0-DB58-6F60-EB24-2BFDC206BF28}"/>
+            </a:ext>
+          </a:extLst>
+        </p:cNvPr>
         <p:cNvGrpSpPr/>
         <p:nvPr/>
       </p:nvGrpSpPr>
@@ -1848,7 +1977,13 @@
       </p:grpSpPr>
       <p:sp>
         <p:nvSpPr>
-          <p:cNvPr id="194" name="Google Shape;194;g387cfdbd564_0_278:notes"/>
+          <p:cNvPr id="187" name="Google Shape;187;g387cfdbd564_0_272:notes">
+            <a:extLst>
+              <a:ext uri="{FF2B5EF4-FFF2-40B4-BE49-F238E27FC236}">
+                <a16:creationId xmlns:a16="http://schemas.microsoft.com/office/drawing/2014/main" id="{D807EE2F-4102-AE8D-5308-922D58780444}"/>
+              </a:ext>
+            </a:extLst>
+          </p:cNvPr>
           <p:cNvSpPr>
             <a:spLocks noGrp="1" noRot="1" noChangeAspect="1"/>
           </p:cNvSpPr>
@@ -1899,7 +2034,13 @@
       </p:sp>
       <p:sp>
         <p:nvSpPr>
-          <p:cNvPr id="195" name="Google Shape;195;g387cfdbd564_0_278:notes"/>
+          <p:cNvPr id="188" name="Google Shape;188;g387cfdbd564_0_272:notes">
+            <a:extLst>
+              <a:ext uri="{FF2B5EF4-FFF2-40B4-BE49-F238E27FC236}">
+                <a16:creationId xmlns:a16="http://schemas.microsoft.com/office/drawing/2014/main" id="{0F91399F-772A-06A7-DAA7-7B393DAFE610}"/>
+              </a:ext>
+            </a:extLst>
+          </p:cNvPr>
           <p:cNvSpPr txBox="1">
             <a:spLocks noGrp="1"/>
           </p:cNvSpPr>
@@ -1944,6 +2085,11 @@
         </p:txBody>
       </p:sp>
     </p:spTree>
+    <p:extLst>
+      <p:ext uri="{BB962C8B-B14F-4D97-AF65-F5344CB8AC3E}">
+        <p14:creationId xmlns:p14="http://schemas.microsoft.com/office/powerpoint/2010/main" val="3671366796"/>
+      </p:ext>
+    </p:extLst>
   </p:cSld>
   <p:clrMapOvr>
     <a:masterClrMapping/>
@@ -18430,6 +18576,444 @@
   <p:cSld>
     <p:spTree>
       <p:nvGrpSpPr>
+        <p:cNvPr id="1" name="Shape 196"/>
+        <p:cNvGrpSpPr/>
+        <p:nvPr/>
+      </p:nvGrpSpPr>
+      <p:grpSpPr>
+        <a:xfrm>
+          <a:off x="0" y="0"/>
+          <a:ext cx="0" cy="0"/>
+          <a:chOff x="0" y="0"/>
+          <a:chExt cx="0" cy="0"/>
+        </a:xfrm>
+      </p:grpSpPr>
+      <p:pic>
+        <p:nvPicPr>
+          <p:cNvPr id="197" name="Google Shape;197;p39"/>
+          <p:cNvPicPr preferRelativeResize="0"/>
+          <p:nvPr/>
+        </p:nvPicPr>
+        <p:blipFill rotWithShape="1">
+          <a:blip r:embed="rId3">
+            <a:alphaModFix/>
+          </a:blip>
+          <a:srcRect/>
+          <a:stretch/>
+        </p:blipFill>
+        <p:spPr>
+          <a:xfrm rot="-8" flipH="1">
+            <a:off x="0" y="159426"/>
+            <a:ext cx="1262074" cy="612173"/>
+          </a:xfrm>
+          <a:prstGeom prst="rect">
+            <a:avLst/>
+          </a:prstGeom>
+          <a:noFill/>
+          <a:ln>
+            <a:noFill/>
+          </a:ln>
+        </p:spPr>
+      </p:pic>
+      <p:sp>
+        <p:nvSpPr>
+          <p:cNvPr id="198" name="Google Shape;198;p39"/>
+          <p:cNvSpPr txBox="1">
+            <a:spLocks noGrp="1"/>
+          </p:cNvSpPr>
+          <p:nvPr>
+            <p:ph type="title"/>
+          </p:nvPr>
+        </p:nvSpPr>
+        <p:spPr>
+          <a:xfrm>
+            <a:off x="1262077" y="282000"/>
+            <a:ext cx="6783900" cy="489600"/>
+          </a:xfrm>
+          <a:prstGeom prst="rect">
+            <a:avLst/>
+          </a:prstGeom>
+          <a:noFill/>
+          <a:ln>
+            <a:noFill/>
+          </a:ln>
+        </p:spPr>
+        <p:txBody>
+          <a:bodyPr spcFirstLastPara="1" wrap="square" lIns="90000" tIns="90000" rIns="91425" bIns="90000" anchor="t" anchorCtr="0">
+            <a:noAutofit/>
+          </a:bodyPr>
+          <a:lstStyle/>
+          <a:p>
+            <a:pPr marL="0" lvl="0" indent="0" algn="l" rtl="0">
+              <a:lnSpc>
+                <a:spcPct val="100000"/>
+              </a:lnSpc>
+              <a:spcBef>
+                <a:spcPts val="0"/>
+              </a:spcBef>
+              <a:spcAft>
+                <a:spcPts val="0"/>
+              </a:spcAft>
+              <a:buSzPts val="2200"/>
+              <a:buNone/>
+            </a:pPr>
+            <a:r>
+              <a:rPr lang="en" sz="3000">
+                <a:solidFill>
+                  <a:schemeClr val="dk1"/>
+                </a:solidFill>
+              </a:rPr>
+              <a:t>Contact</a:t>
+            </a:r>
+            <a:endParaRPr sz="800">
+              <a:latin typeface="Audiowide"/>
+              <a:ea typeface="Audiowide"/>
+              <a:cs typeface="Audiowide"/>
+              <a:sym typeface="Audiowide"/>
+            </a:endParaRPr>
+          </a:p>
+        </p:txBody>
+      </p:sp>
+      <p:sp>
+        <p:nvSpPr>
+          <p:cNvPr id="199" name="Google Shape;199;p39"/>
+          <p:cNvSpPr txBox="1"/>
+          <p:nvPr/>
+        </p:nvSpPr>
+        <p:spPr>
+          <a:xfrm>
+            <a:off x="657750" y="1132650"/>
+            <a:ext cx="7686900" cy="3200400"/>
+          </a:xfrm>
+          <a:prstGeom prst="rect">
+            <a:avLst/>
+          </a:prstGeom>
+          <a:noFill/>
+          <a:ln>
+            <a:noFill/>
+          </a:ln>
+        </p:spPr>
+        <p:txBody>
+          <a:bodyPr spcFirstLastPara="1" wrap="square" lIns="91425" tIns="91425" rIns="91425" bIns="91425" anchor="t" anchorCtr="0">
+            <a:noAutofit/>
+          </a:bodyPr>
+          <a:lstStyle/>
+          <a:p>
+            <a:pPr marL="298450" lvl="0" indent="-285750">
+              <a:buClr>
+                <a:schemeClr val="dk1"/>
+              </a:buClr>
+              <a:buFontTx/>
+              <a:buChar char="-"/>
+            </a:pPr>
+            <a:r>
+              <a:rPr lang="pt-PT" sz="1800" i="1" dirty="0">
+                <a:solidFill>
+                  <a:schemeClr val="dk1"/>
+                </a:solidFill>
+                <a:latin typeface="Roboto"/>
+                <a:ea typeface="Roboto"/>
+                <a:cs typeface="Roboto"/>
+                <a:sym typeface="Roboto"/>
+              </a:rPr>
+              <a:t>Rodrigo Oliveira – Chairman - </a:t>
+            </a:r>
+            <a:r>
+              <a:rPr lang="pt-PT" sz="1800" i="1" dirty="0" err="1">
+                <a:solidFill>
+                  <a:schemeClr val="dk1"/>
+                </a:solidFill>
+                <a:latin typeface="Roboto"/>
+                <a:ea typeface="Roboto"/>
+                <a:cs typeface="Roboto"/>
+                <a:sym typeface="Roboto"/>
+              </a:rPr>
+              <a:t>rodrigo.oliveira@engineeringhub.man</a:t>
+            </a:r>
+            <a:endParaRPr lang="pt-PT" sz="1800" i="1" dirty="0">
+              <a:solidFill>
+                <a:schemeClr val="dk1"/>
+              </a:solidFill>
+              <a:latin typeface="Roboto"/>
+              <a:ea typeface="Roboto"/>
+              <a:cs typeface="Roboto"/>
+              <a:sym typeface="Roboto"/>
+            </a:endParaRPr>
+          </a:p>
+          <a:p>
+            <a:pPr marL="298450" indent="-285750">
+              <a:buClr>
+                <a:schemeClr val="dk1"/>
+              </a:buClr>
+              <a:buFontTx/>
+              <a:buChar char="-"/>
+            </a:pPr>
+            <a:r>
+              <a:rPr lang="pt-PT" sz="1800" i="1" dirty="0">
+                <a:solidFill>
+                  <a:schemeClr val="dk1"/>
+                </a:solidFill>
+                <a:latin typeface="Roboto"/>
+                <a:ea typeface="Roboto"/>
+                <a:cs typeface="Roboto"/>
+                <a:sym typeface="Roboto"/>
+              </a:rPr>
+              <a:t>Catarina Ferreira – UI/UX Designer -</a:t>
+            </a:r>
+            <a:r>
+              <a:rPr lang="en-US" sz="1800" i="1" dirty="0" err="1">
+                <a:solidFill>
+                  <a:schemeClr val="dk1"/>
+                </a:solidFill>
+                <a:latin typeface="Roboto"/>
+                <a:ea typeface="Roboto"/>
+                <a:cs typeface="Roboto"/>
+              </a:rPr>
+              <a:t>catarina.ferreira@engineeringhub.man</a:t>
+            </a:r>
+            <a:endParaRPr lang="pt-PT" sz="1800" i="1" dirty="0">
+              <a:solidFill>
+                <a:schemeClr val="dk1"/>
+              </a:solidFill>
+              <a:latin typeface="Roboto"/>
+              <a:ea typeface="Roboto"/>
+              <a:cs typeface="Roboto"/>
+              <a:sym typeface="Roboto"/>
+            </a:endParaRPr>
+          </a:p>
+          <a:p>
+            <a:pPr marL="298450" lvl="0" indent="-285750">
+              <a:buClr>
+                <a:schemeClr val="dk1"/>
+              </a:buClr>
+              <a:buFontTx/>
+              <a:buChar char="-"/>
+            </a:pPr>
+            <a:r>
+              <a:rPr lang="pt-PT" sz="1800" i="1" dirty="0">
+                <a:solidFill>
+                  <a:schemeClr val="dk1"/>
+                </a:solidFill>
+                <a:latin typeface="Roboto"/>
+                <a:ea typeface="Roboto"/>
+                <a:cs typeface="Roboto"/>
+                <a:sym typeface="Roboto"/>
+              </a:rPr>
+              <a:t>Guilherme Barros – </a:t>
+            </a:r>
+            <a:r>
+              <a:rPr lang="pt-PT" sz="1800" i="1" dirty="0" err="1">
+                <a:solidFill>
+                  <a:schemeClr val="dk1"/>
+                </a:solidFill>
+                <a:latin typeface="Roboto"/>
+                <a:ea typeface="Roboto"/>
+                <a:cs typeface="Roboto"/>
+                <a:sym typeface="Roboto"/>
+              </a:rPr>
+              <a:t>Finance</a:t>
+            </a:r>
+            <a:r>
+              <a:rPr lang="pt-PT" sz="1800" i="1" dirty="0">
+                <a:solidFill>
+                  <a:schemeClr val="dk1"/>
+                </a:solidFill>
+                <a:latin typeface="Roboto"/>
+                <a:ea typeface="Roboto"/>
+                <a:cs typeface="Roboto"/>
+                <a:sym typeface="Roboto"/>
+              </a:rPr>
+              <a:t> </a:t>
+            </a:r>
+            <a:r>
+              <a:rPr lang="pt-PT" sz="1800" i="1" dirty="0" err="1">
+                <a:solidFill>
+                  <a:schemeClr val="dk1"/>
+                </a:solidFill>
+                <a:latin typeface="Roboto"/>
+                <a:ea typeface="Roboto"/>
+                <a:cs typeface="Roboto"/>
+                <a:sym typeface="Roboto"/>
+              </a:rPr>
+              <a:t>and</a:t>
+            </a:r>
+            <a:r>
+              <a:rPr lang="pt-PT" sz="1800" i="1" dirty="0">
+                <a:solidFill>
+                  <a:schemeClr val="dk1"/>
+                </a:solidFill>
+                <a:latin typeface="Roboto"/>
+                <a:ea typeface="Roboto"/>
+                <a:cs typeface="Roboto"/>
+                <a:sym typeface="Roboto"/>
+              </a:rPr>
+              <a:t> </a:t>
+            </a:r>
+            <a:r>
+              <a:rPr lang="pt-PT" sz="1800" i="1" dirty="0" err="1">
+                <a:solidFill>
+                  <a:schemeClr val="dk1"/>
+                </a:solidFill>
+                <a:latin typeface="Roboto"/>
+                <a:ea typeface="Roboto"/>
+                <a:cs typeface="Roboto"/>
+                <a:sym typeface="Roboto"/>
+              </a:rPr>
+              <a:t>contracts</a:t>
+            </a:r>
+            <a:r>
+              <a:rPr lang="pt-PT" sz="1800" i="1" dirty="0">
+                <a:solidFill>
+                  <a:schemeClr val="dk1"/>
+                </a:solidFill>
+                <a:latin typeface="Roboto"/>
+                <a:ea typeface="Roboto"/>
+                <a:cs typeface="Roboto"/>
+                <a:sym typeface="Roboto"/>
+              </a:rPr>
+              <a:t> – </a:t>
+            </a:r>
+            <a:r>
+              <a:rPr lang="pt-PT" sz="1800" i="1" dirty="0" err="1">
+                <a:solidFill>
+                  <a:schemeClr val="dk1"/>
+                </a:solidFill>
+                <a:latin typeface="Roboto"/>
+                <a:ea typeface="Roboto"/>
+                <a:cs typeface="Roboto"/>
+                <a:sym typeface="Roboto"/>
+              </a:rPr>
+              <a:t>guilherme.barros@engineeringhub.man</a:t>
+            </a:r>
+            <a:endParaRPr lang="pt-PT" sz="1800" i="1" dirty="0">
+              <a:solidFill>
+                <a:schemeClr val="dk1"/>
+              </a:solidFill>
+              <a:latin typeface="Roboto"/>
+              <a:ea typeface="Roboto"/>
+              <a:cs typeface="Roboto"/>
+              <a:sym typeface="Roboto"/>
+            </a:endParaRPr>
+          </a:p>
+          <a:p>
+            <a:pPr marL="298450" indent="-285750">
+              <a:buClr>
+                <a:schemeClr val="dk1"/>
+              </a:buClr>
+              <a:buFontTx/>
+              <a:buChar char="-"/>
+            </a:pPr>
+            <a:r>
+              <a:rPr lang="pt-PT" sz="1800" i="1" dirty="0">
+                <a:solidFill>
+                  <a:schemeClr val="dk1"/>
+                </a:solidFill>
+                <a:latin typeface="Roboto"/>
+                <a:ea typeface="Roboto"/>
+                <a:cs typeface="Roboto"/>
+                <a:sym typeface="Roboto"/>
+              </a:rPr>
+              <a:t>Bruno de </a:t>
+            </a:r>
+            <a:r>
+              <a:rPr lang="pt-PT" sz="1800" i="1">
+                <a:solidFill>
+                  <a:schemeClr val="dk1"/>
+                </a:solidFill>
+                <a:latin typeface="Roboto"/>
+                <a:ea typeface="Roboto"/>
+                <a:cs typeface="Roboto"/>
+                <a:sym typeface="Roboto"/>
+              </a:rPr>
+              <a:t>Sousa – Archictect</a:t>
+            </a:r>
+            <a:r>
+              <a:rPr lang="pt-PT" sz="1800" i="1" dirty="0">
+                <a:solidFill>
+                  <a:schemeClr val="dk1"/>
+                </a:solidFill>
+                <a:latin typeface="Roboto"/>
+                <a:ea typeface="Roboto"/>
+                <a:cs typeface="Roboto"/>
+                <a:sym typeface="Roboto"/>
+              </a:rPr>
+              <a:t> - </a:t>
+            </a:r>
+            <a:r>
+              <a:rPr lang="en-US" sz="1800" i="1" dirty="0" err="1">
+                <a:solidFill>
+                  <a:schemeClr val="dk1"/>
+                </a:solidFill>
+                <a:latin typeface="Roboto"/>
+                <a:ea typeface="Roboto"/>
+                <a:cs typeface="Roboto"/>
+              </a:rPr>
+              <a:t>bruno.sousa@engineeringhub.man</a:t>
+            </a:r>
+            <a:endParaRPr lang="en-US" sz="1800" i="1" dirty="0">
+              <a:solidFill>
+                <a:schemeClr val="dk1"/>
+              </a:solidFill>
+              <a:latin typeface="Roboto"/>
+              <a:ea typeface="Roboto"/>
+              <a:cs typeface="Roboto"/>
+            </a:endParaRPr>
+          </a:p>
+          <a:p>
+            <a:pPr marL="12700" lvl="0">
+              <a:buClr>
+                <a:schemeClr val="dk1"/>
+              </a:buClr>
+            </a:pPr>
+            <a:endParaRPr lang="pt-PT" sz="1800" i="1" dirty="0">
+              <a:solidFill>
+                <a:schemeClr val="dk1"/>
+              </a:solidFill>
+              <a:latin typeface="Roboto"/>
+              <a:ea typeface="Roboto"/>
+              <a:cs typeface="Roboto"/>
+              <a:sym typeface="Roboto"/>
+            </a:endParaRPr>
+          </a:p>
+          <a:p>
+            <a:pPr marL="12700" lvl="0" indent="0" algn="l" rtl="0">
+              <a:spcBef>
+                <a:spcPts val="0"/>
+              </a:spcBef>
+              <a:spcAft>
+                <a:spcPts val="0"/>
+              </a:spcAft>
+              <a:buClr>
+                <a:schemeClr val="dk1"/>
+              </a:buClr>
+              <a:buFont typeface="Arial"/>
+              <a:buNone/>
+            </a:pPr>
+            <a:endParaRPr lang="en" sz="1800" dirty="0">
+              <a:solidFill>
+                <a:schemeClr val="dk1"/>
+              </a:solidFill>
+              <a:latin typeface="Roboto"/>
+              <a:ea typeface="Roboto"/>
+              <a:cs typeface="Roboto"/>
+              <a:sym typeface="Roboto"/>
+            </a:endParaRPr>
+          </a:p>
+        </p:txBody>
+      </p:sp>
+    </p:spTree>
+  </p:cSld>
+  <p:clrMapOvr>
+    <a:masterClrMapping/>
+  </p:clrMapOvr>
+</p:sld>
+</file>
+
+<file path=ppt/slides/slide11.xml><?xml version="1.0" encoding="utf-8"?>
+<p:sld xmlns:a="http://schemas.openxmlformats.org/drawingml/2006/main" xmlns:r="http://schemas.openxmlformats.org/officeDocument/2006/relationships" xmlns:p="http://schemas.openxmlformats.org/presentationml/2006/main">
+  <p:cSld>
+    <p:spTree>
+      <p:nvGrpSpPr>
         <p:cNvPr id="1" name="Shape 203"/>
         <p:cNvGrpSpPr/>
         <p:nvPr/>
@@ -19072,15 +19656,7 @@
             </a:br>
             <a:r>
               <a:rPr lang="en-GB" sz="1600" dirty="0"/>
-              <a:t>We </a:t>
-            </a:r>
-            <a:r>
-              <a:rPr lang="en-GB" sz="1600"/>
-              <a:t>built an pothole </a:t>
-            </a:r>
-            <a:r>
-              <a:rPr lang="en-GB" sz="1600" dirty="0"/>
-              <a:t>detector that uses vehicle sensors to automatically detect, classify, and share pothole events in real time.</a:t>
+              <a:t>We built an pothole detector that uses vehicle sensors to automatically detect, classify, and share pothole events in real time.</a:t>
             </a:r>
           </a:p>
           <a:p>
@@ -20240,7 +20816,13 @@
   <p:cSld>
     <p:spTree>
       <p:nvGrpSpPr>
-        <p:cNvPr id="1" name="Shape 196"/>
+        <p:cNvPr id="1" name="Shape 189">
+          <a:extLst>
+            <a:ext uri="{FF2B5EF4-FFF2-40B4-BE49-F238E27FC236}">
+              <a16:creationId xmlns:a16="http://schemas.microsoft.com/office/drawing/2014/main" id="{82713C60-F84D-370A-D7E3-A4B522D74FC2}"/>
+            </a:ext>
+          </a:extLst>
+        </p:cNvPr>
         <p:cNvGrpSpPr/>
         <p:nvPr/>
       </p:nvGrpSpPr>
@@ -20254,7 +20836,13 @@
       </p:grpSpPr>
       <p:pic>
         <p:nvPicPr>
-          <p:cNvPr id="197" name="Google Shape;197;p39"/>
+          <p:cNvPr id="190" name="Google Shape;190;p38">
+            <a:extLst>
+              <a:ext uri="{FF2B5EF4-FFF2-40B4-BE49-F238E27FC236}">
+                <a16:creationId xmlns:a16="http://schemas.microsoft.com/office/drawing/2014/main" id="{5D9A04DE-E1FA-4CA7-9ECB-11F3A5BE9FA9}"/>
+              </a:ext>
+            </a:extLst>
+          </p:cNvPr>
           <p:cNvPicPr preferRelativeResize="0"/>
           <p:nvPr/>
         </p:nvPicPr>
@@ -20281,7 +20869,13 @@
       </p:pic>
       <p:sp>
         <p:nvSpPr>
-          <p:cNvPr id="198" name="Google Shape;198;p39"/>
+          <p:cNvPr id="191" name="Google Shape;191;p38">
+            <a:extLst>
+              <a:ext uri="{FF2B5EF4-FFF2-40B4-BE49-F238E27FC236}">
+                <a16:creationId xmlns:a16="http://schemas.microsoft.com/office/drawing/2014/main" id="{F3AF0F07-3713-7AB9-084D-408CDD1A90AD}"/>
+              </a:ext>
+            </a:extLst>
+          </p:cNvPr>
           <p:cNvSpPr txBox="1">
             <a:spLocks noGrp="1"/>
           </p:cNvSpPr>
@@ -20322,14 +20916,14 @@
               <a:buNone/>
             </a:pPr>
             <a:r>
-              <a:rPr lang="en" sz="3000">
+              <a:rPr lang="en" sz="3000" dirty="0">
                 <a:solidFill>
                   <a:schemeClr val="dk1"/>
                 </a:solidFill>
               </a:rPr>
-              <a:t>Contact</a:t>
+              <a:t>Future work</a:t>
             </a:r>
-            <a:endParaRPr sz="800">
+            <a:endParaRPr sz="800" dirty="0">
               <a:latin typeface="Audiowide"/>
               <a:ea typeface="Audiowide"/>
               <a:cs typeface="Audiowide"/>
@@ -20340,7 +20934,13 @@
       </p:sp>
       <p:sp>
         <p:nvSpPr>
-          <p:cNvPr id="199" name="Google Shape;199;p39"/>
+          <p:cNvPr id="192" name="Google Shape;192;p38">
+            <a:extLst>
+              <a:ext uri="{FF2B5EF4-FFF2-40B4-BE49-F238E27FC236}">
+                <a16:creationId xmlns:a16="http://schemas.microsoft.com/office/drawing/2014/main" id="{E6E6B42A-F631-A11E-2D15-BC06B73B33AC}"/>
+              </a:ext>
+            </a:extLst>
+          </p:cNvPr>
           <p:cNvSpPr txBox="1"/>
           <p:nvPr/>
         </p:nvSpPr>
@@ -20363,289 +20963,15 @@
           </a:bodyPr>
           <a:lstStyle/>
           <a:p>
-            <a:pPr marL="298450" lvl="0" indent="-285750">
+            <a:pPr marL="12700" lvl="0">
               <a:buClr>
                 <a:schemeClr val="dk1"/>
               </a:buClr>
-              <a:buFontTx/>
-              <a:buChar char="-"/>
             </a:pPr>
             <a:r>
-              <a:rPr lang="pt-PT" sz="1800" i="1" dirty="0">
-                <a:solidFill>
-                  <a:schemeClr val="dk1"/>
-                </a:solidFill>
-                <a:latin typeface="Roboto"/>
-                <a:ea typeface="Roboto"/>
-                <a:cs typeface="Roboto"/>
-                <a:sym typeface="Roboto"/>
-              </a:rPr>
-              <a:t>Rodrigo Oliveira – Chairman - </a:t>
+              <a:rPr lang="en-US" sz="1800" dirty="0"/>
+              <a:t>Our current solution relies on the car sensor data, meaning at least one vehicle will have to hit a pothole for it to be reported.</a:t>
             </a:r>
-            <a:r>
-              <a:rPr lang="pt-PT" sz="1800" i="1" dirty="0" err="1">
-                <a:solidFill>
-                  <a:schemeClr val="dk1"/>
-                </a:solidFill>
-                <a:latin typeface="Roboto"/>
-                <a:ea typeface="Roboto"/>
-                <a:cs typeface="Roboto"/>
-                <a:sym typeface="Roboto"/>
-              </a:rPr>
-              <a:t>rodrigo.oliveira@engineeringhub.man</a:t>
-            </a:r>
-            <a:endParaRPr lang="pt-PT" sz="1800" i="1" dirty="0">
-              <a:solidFill>
-                <a:schemeClr val="dk1"/>
-              </a:solidFill>
-              <a:latin typeface="Roboto"/>
-              <a:ea typeface="Roboto"/>
-              <a:cs typeface="Roboto"/>
-              <a:sym typeface="Roboto"/>
-            </a:endParaRPr>
-          </a:p>
-          <a:p>
-            <a:pPr marL="298450" indent="-285750">
-              <a:buClr>
-                <a:schemeClr val="dk1"/>
-              </a:buClr>
-              <a:buFontTx/>
-              <a:buChar char="-"/>
-            </a:pPr>
-            <a:r>
-              <a:rPr lang="pt-PT" sz="1800" i="1" dirty="0">
-                <a:solidFill>
-                  <a:schemeClr val="dk1"/>
-                </a:solidFill>
-                <a:latin typeface="Roboto"/>
-                <a:ea typeface="Roboto"/>
-                <a:cs typeface="Roboto"/>
-                <a:sym typeface="Roboto"/>
-              </a:rPr>
-              <a:t>Catarina Ferreira – UI/UX Designer -</a:t>
-            </a:r>
-            <a:r>
-              <a:rPr lang="en-US" sz="1800" i="1" dirty="0" err="1">
-                <a:solidFill>
-                  <a:schemeClr val="dk1"/>
-                </a:solidFill>
-                <a:latin typeface="Roboto"/>
-                <a:ea typeface="Roboto"/>
-                <a:cs typeface="Roboto"/>
-              </a:rPr>
-              <a:t>catarina.ferreira@engineeringhub.man</a:t>
-            </a:r>
-            <a:endParaRPr lang="pt-PT" sz="1800" i="1" dirty="0">
-              <a:solidFill>
-                <a:schemeClr val="dk1"/>
-              </a:solidFill>
-              <a:latin typeface="Roboto"/>
-              <a:ea typeface="Roboto"/>
-              <a:cs typeface="Roboto"/>
-              <a:sym typeface="Roboto"/>
-            </a:endParaRPr>
-          </a:p>
-          <a:p>
-            <a:pPr marL="298450" lvl="0" indent="-285750">
-              <a:buClr>
-                <a:schemeClr val="dk1"/>
-              </a:buClr>
-              <a:buFontTx/>
-              <a:buChar char="-"/>
-            </a:pPr>
-            <a:r>
-              <a:rPr lang="pt-PT" sz="1800" i="1" dirty="0">
-                <a:solidFill>
-                  <a:schemeClr val="dk1"/>
-                </a:solidFill>
-                <a:latin typeface="Roboto"/>
-                <a:ea typeface="Roboto"/>
-                <a:cs typeface="Roboto"/>
-                <a:sym typeface="Roboto"/>
-              </a:rPr>
-              <a:t>Guilherme Barros – </a:t>
-            </a:r>
-            <a:r>
-              <a:rPr lang="pt-PT" sz="1800" i="1" dirty="0" err="1">
-                <a:solidFill>
-                  <a:schemeClr val="dk1"/>
-                </a:solidFill>
-                <a:latin typeface="Roboto"/>
-                <a:ea typeface="Roboto"/>
-                <a:cs typeface="Roboto"/>
-                <a:sym typeface="Roboto"/>
-              </a:rPr>
-              <a:t>Finance</a:t>
-            </a:r>
-            <a:r>
-              <a:rPr lang="pt-PT" sz="1800" i="1" dirty="0">
-                <a:solidFill>
-                  <a:schemeClr val="dk1"/>
-                </a:solidFill>
-                <a:latin typeface="Roboto"/>
-                <a:ea typeface="Roboto"/>
-                <a:cs typeface="Roboto"/>
-                <a:sym typeface="Roboto"/>
-              </a:rPr>
-              <a:t> </a:t>
-            </a:r>
-            <a:r>
-              <a:rPr lang="pt-PT" sz="1800" i="1" dirty="0" err="1">
-                <a:solidFill>
-                  <a:schemeClr val="dk1"/>
-                </a:solidFill>
-                <a:latin typeface="Roboto"/>
-                <a:ea typeface="Roboto"/>
-                <a:cs typeface="Roboto"/>
-                <a:sym typeface="Roboto"/>
-              </a:rPr>
-              <a:t>and</a:t>
-            </a:r>
-            <a:r>
-              <a:rPr lang="pt-PT" sz="1800" i="1" dirty="0">
-                <a:solidFill>
-                  <a:schemeClr val="dk1"/>
-                </a:solidFill>
-                <a:latin typeface="Roboto"/>
-                <a:ea typeface="Roboto"/>
-                <a:cs typeface="Roboto"/>
-                <a:sym typeface="Roboto"/>
-              </a:rPr>
-              <a:t> </a:t>
-            </a:r>
-            <a:r>
-              <a:rPr lang="pt-PT" sz="1800" i="1" dirty="0" err="1">
-                <a:solidFill>
-                  <a:schemeClr val="dk1"/>
-                </a:solidFill>
-                <a:latin typeface="Roboto"/>
-                <a:ea typeface="Roboto"/>
-                <a:cs typeface="Roboto"/>
-                <a:sym typeface="Roboto"/>
-              </a:rPr>
-              <a:t>contracts</a:t>
-            </a:r>
-            <a:r>
-              <a:rPr lang="pt-PT" sz="1800" i="1" dirty="0">
-                <a:solidFill>
-                  <a:schemeClr val="dk1"/>
-                </a:solidFill>
-                <a:latin typeface="Roboto"/>
-                <a:ea typeface="Roboto"/>
-                <a:cs typeface="Roboto"/>
-                <a:sym typeface="Roboto"/>
-              </a:rPr>
-              <a:t> – </a:t>
-            </a:r>
-            <a:r>
-              <a:rPr lang="pt-PT" sz="1800" i="1" dirty="0" err="1">
-                <a:solidFill>
-                  <a:schemeClr val="dk1"/>
-                </a:solidFill>
-                <a:latin typeface="Roboto"/>
-                <a:ea typeface="Roboto"/>
-                <a:cs typeface="Roboto"/>
-                <a:sym typeface="Roboto"/>
-              </a:rPr>
-              <a:t>guilherme.barros@engineeringhub.man</a:t>
-            </a:r>
-            <a:endParaRPr lang="pt-PT" sz="1800" i="1" dirty="0">
-              <a:solidFill>
-                <a:schemeClr val="dk1"/>
-              </a:solidFill>
-              <a:latin typeface="Roboto"/>
-              <a:ea typeface="Roboto"/>
-              <a:cs typeface="Roboto"/>
-              <a:sym typeface="Roboto"/>
-            </a:endParaRPr>
-          </a:p>
-          <a:p>
-            <a:pPr marL="298450" indent="-285750">
-              <a:buClr>
-                <a:schemeClr val="dk1"/>
-              </a:buClr>
-              <a:buFontTx/>
-              <a:buChar char="-"/>
-            </a:pPr>
-            <a:r>
-              <a:rPr lang="pt-PT" sz="1800" i="1" dirty="0">
-                <a:solidFill>
-                  <a:schemeClr val="dk1"/>
-                </a:solidFill>
-                <a:latin typeface="Roboto"/>
-                <a:ea typeface="Roboto"/>
-                <a:cs typeface="Roboto"/>
-                <a:sym typeface="Roboto"/>
-              </a:rPr>
-              <a:t>Bruno de Sousa – </a:t>
-            </a:r>
-            <a:r>
-              <a:rPr lang="pt-PT" sz="1800" i="1" dirty="0" err="1">
-                <a:solidFill>
-                  <a:schemeClr val="dk1"/>
-                </a:solidFill>
-                <a:latin typeface="Roboto"/>
-                <a:ea typeface="Roboto"/>
-                <a:cs typeface="Roboto"/>
-                <a:sym typeface="Roboto"/>
-              </a:rPr>
-              <a:t>Cloud</a:t>
-            </a:r>
-            <a:r>
-              <a:rPr lang="pt-PT" sz="1800" i="1" dirty="0">
-                <a:solidFill>
-                  <a:schemeClr val="dk1"/>
-                </a:solidFill>
-                <a:latin typeface="Roboto"/>
-                <a:ea typeface="Roboto"/>
-                <a:cs typeface="Roboto"/>
-                <a:sym typeface="Roboto"/>
-              </a:rPr>
-              <a:t> </a:t>
-            </a:r>
-            <a:r>
-              <a:rPr lang="pt-PT" sz="1800" i="1" dirty="0" err="1">
-                <a:solidFill>
-                  <a:schemeClr val="dk1"/>
-                </a:solidFill>
-                <a:latin typeface="Roboto"/>
-                <a:ea typeface="Roboto"/>
-                <a:cs typeface="Roboto"/>
-                <a:sym typeface="Roboto"/>
-              </a:rPr>
-              <a:t>Archictect</a:t>
-            </a:r>
-            <a:r>
-              <a:rPr lang="pt-PT" sz="1800" i="1" dirty="0">
-                <a:solidFill>
-                  <a:schemeClr val="dk1"/>
-                </a:solidFill>
-                <a:latin typeface="Roboto"/>
-                <a:ea typeface="Roboto"/>
-                <a:cs typeface="Roboto"/>
-                <a:sym typeface="Roboto"/>
-              </a:rPr>
-              <a:t> - </a:t>
-            </a:r>
-            <a:r>
-              <a:rPr lang="en-US" sz="1800" i="1" dirty="0" err="1">
-                <a:solidFill>
-                  <a:schemeClr val="dk1"/>
-                </a:solidFill>
-                <a:latin typeface="Roboto"/>
-                <a:ea typeface="Roboto"/>
-                <a:cs typeface="Roboto"/>
-              </a:rPr>
-              <a:t>bruno.sousa@engineeringhub.man</a:t>
-            </a:r>
-            <a:endParaRPr lang="en-US" sz="1800" i="1" dirty="0">
-              <a:solidFill>
-                <a:schemeClr val="dk1"/>
-              </a:solidFill>
-              <a:latin typeface="Roboto"/>
-              <a:ea typeface="Roboto"/>
-              <a:cs typeface="Roboto"/>
-            </a:endParaRPr>
           </a:p>
           <a:p>
             <a:pPr marL="12700" lvl="0">
@@ -20653,43 +20979,35 @@
                 <a:schemeClr val="dk1"/>
               </a:buClr>
             </a:pPr>
-            <a:endParaRPr lang="pt-PT" sz="1800" i="1" dirty="0">
-              <a:solidFill>
-                <a:schemeClr val="dk1"/>
-              </a:solidFill>
-              <a:latin typeface="Roboto"/>
-              <a:ea typeface="Roboto"/>
-              <a:cs typeface="Roboto"/>
-              <a:sym typeface="Roboto"/>
-            </a:endParaRPr>
+            <a:endParaRPr lang="en-US" sz="1800" dirty="0"/>
           </a:p>
           <a:p>
-            <a:pPr marL="12700" lvl="0" indent="0" algn="l" rtl="0">
-              <a:spcBef>
-                <a:spcPts val="0"/>
-              </a:spcBef>
-              <a:spcAft>
-                <a:spcPts val="0"/>
-              </a:spcAft>
+            <a:pPr marL="12700" lvl="0">
               <a:buClr>
                 <a:schemeClr val="dk1"/>
               </a:buClr>
-              <a:buFont typeface="Arial"/>
-              <a:buNone/>
             </a:pPr>
-            <a:endParaRPr lang="en" sz="1800" dirty="0">
-              <a:solidFill>
+            <a:r>
+              <a:rPr lang="en-US" sz="1800" dirty="0"/>
+              <a:t>We plan to improve our solution by incorporating image recognition technology to detect potholes in advance.</a:t>
+            </a:r>
+          </a:p>
+          <a:p>
+            <a:pPr marL="12700" lvl="0">
+              <a:buClr>
                 <a:schemeClr val="dk1"/>
-              </a:solidFill>
-              <a:latin typeface="Roboto"/>
-              <a:ea typeface="Roboto"/>
-              <a:cs typeface="Roboto"/>
-              <a:sym typeface="Roboto"/>
-            </a:endParaRPr>
+              </a:buClr>
+            </a:pPr>
+            <a:endParaRPr lang="en-US" sz="1800" dirty="0"/>
           </a:p>
         </p:txBody>
       </p:sp>
     </p:spTree>
+    <p:extLst>
+      <p:ext uri="{BB962C8B-B14F-4D97-AF65-F5344CB8AC3E}">
+        <p14:creationId xmlns:p14="http://schemas.microsoft.com/office/powerpoint/2010/main" val="3092385303"/>
+      </p:ext>
+    </p:extLst>
   </p:cSld>
   <p:clrMapOvr>
     <a:masterClrMapping/>

--- a/Final Pitch.pptx
+++ b/Final Pitch.pptx
@@ -18913,7 +18913,7 @@
                 <a:cs typeface="Roboto"/>
                 <a:sym typeface="Roboto"/>
               </a:rPr>
-              <a:t>Bruno de </a:t>
+              <a:t>Bruno de Sousa </a:t>
             </a:r>
             <a:r>
               <a:rPr lang="pt-PT" sz="1800" i="1">
@@ -18925,7 +18925,7 @@
                 <a:cs typeface="Roboto"/>
                 <a:sym typeface="Roboto"/>
               </a:rPr>
-              <a:t>Sousa – Archictect</a:t>
+              <a:t>– Principal Architect</a:t>
             </a:r>
             <a:r>
               <a:rPr lang="pt-PT" sz="1800" i="1" dirty="0">
